--- a/public/fun/pack/pptx/weddingpro/결혼식프리미엄_01_소개중심_아이보리로즈골드.pptx
+++ b/public/fun/pack/pptx/weddingpro/결혼식프리미엄_01_소개중심_아이보리로즈골드.pptx
@@ -113,12 +113,12 @@
   <p:extLst>
     <p:ext uri="{521415D9-36F7-43E2-AB2F-B90AF26B5E84}">
       <p14:sectionLst xmlns:p14="http://schemas.microsoft.com/office/powerpoint/2010/main">
-        <p14:section name="시작" id="{ADFFC39C-899F-4B37-979D-D0A6C1C6DA70}">
+        <p14:section name="시작" id="{57F2EDF6-A45D-4742-AA8C-E6312A5E3CCD}">
           <p14:sldIdLst>
             <p14:sldId id="256"/>
           </p14:sldIdLst>
         </p14:section>
-        <p14:section name="본문" id="{00868F74-29E2-41FE-8409-7F319EFC42D5}">
+        <p14:section name="본문" id="{12D5FF36-662A-482D-808F-236B86265BE1}">
           <p14:sldIdLst>
             <p14:sldId id="257"/>
             <p14:sldId id="258"/>
@@ -127,7 +127,7 @@
             <p14:sldId id="261"/>
           </p14:sldIdLst>
         </p14:section>
-        <p14:section name="마무리" id="{EB48363E-65F3-415B-A385-5C8BDA5A5695}">
+        <p14:section name="마무리" id="{D33E2FE0-5F05-43D1-8EDE-9E9B834E3EC5}">
           <p14:sldIdLst>
             <p14:sldId id="262"/>
           </p14:sldIdLst>
@@ -1559,7 +1559,7 @@
             </a:lvl1pPr>
           </a:lstStyle>
           <a:p>
-            <a:fld id="{5612720D-38E5-4BF1-BAD1-D14FF9ACC962}" type="slidenum">
+            <a:fld id="{AA1B6222-4F6E-4E52-BA9E-5DD48640C37A}" type="slidenum">
               <a:rPr lang="en-US"/>
               <a:t>‹#›</a:t>
             </a:fld>
@@ -2278,7 +2278,7 @@
             </a:lvl1pPr>
           </a:lstStyle>
           <a:p>
-            <a:fld id="{EB9E3D8A-EFA7-45B3-B0D0-3539AF76E0E6}" type="slidenum">
+            <a:fld id="{1834DD04-B814-45D1-B2D1-D05EFF2DF4AB}" type="slidenum">
               <a:rPr lang="en-US"/>
               <a:t>‹#›</a:t>
             </a:fld>
@@ -2962,7 +2962,7 @@
             </a:lvl1pPr>
           </a:lstStyle>
           <a:p>
-            <a:fld id="{5A4DDF7B-7378-4150-989B-8EF81D531057}" type="slidenum">
+            <a:fld id="{3C8295A7-A002-4C46-90AB-B72E8D55D831}" type="slidenum">
               <a:rPr lang="en-US"/>
               <a:t>‹#›</a:t>
             </a:fld>
@@ -3813,7 +3813,7 @@
           <a:p>
             <a:r>
               <a:rPr lang="ko-KR"/>
-              <a:t>0000. 00. 00 · 예식장 이름</a:t>
+              <a:t>날짜 입력 · 예식장 이름</a:t>
             </a:r>
           </a:p>
         </p:txBody>
@@ -4048,7 +4048,7 @@
           <a:bodyPr/>
           <a:lstStyle/>
           <a:p>
-            <a:fld id="{ED72889D-3758-4B77-ADB5-DB2BF2046178}" type="slidenum">
+            <a:fld id="{7124C8A4-8A73-4FCB-A75F-CA53AD90540A}" type="slidenum">
               <a:rPr lang="en-US"/>
               <a:t>‹#›</a:t>
             </a:fld>
@@ -4504,7 +4504,7 @@
           <a:bodyPr/>
           <a:lstStyle/>
           <a:p>
-            <a:fld id="{626414D6-588B-4FA3-8C23-E57476F45D6F}" type="slidenum">
+            <a:fld id="{73B646A7-E1F7-4694-BFD9-E24BA3CC2FD3}" type="slidenum">
               <a:rPr lang="en-US"/>
               <a:t>‹#›</a:t>
             </a:fld>
@@ -5156,7 +5156,7 @@
           <a:bodyPr/>
           <a:lstStyle/>
           <a:p>
-            <a:fld id="{6FE0AACA-BD99-4F3B-AB42-3083068ADAAC}" type="slidenum">
+            <a:fld id="{9A8036A0-2D5E-4621-A2E8-2512BFD2441A}" type="slidenum">
               <a:rPr lang="en-US"/>
               <a:t>‹#›</a:t>
             </a:fld>
@@ -6112,7 +6112,7 @@
           <a:bodyPr/>
           <a:lstStyle/>
           <a:p>
-            <a:fld id="{A086D511-6B55-4ED8-B002-B27DA8FA45D6}" type="slidenum">
+            <a:fld id="{BD3CC8D0-A9BA-474C-8327-89BF28192DAD}" type="slidenum">
               <a:rPr lang="en-US"/>
               <a:t>‹#›</a:t>
             </a:fld>
@@ -6200,7 +6200,7 @@
           <a:bodyPr/>
           <a:lstStyle/>
           <a:p>
-            <a:fld id="{126EEEA3-F1AC-4AA7-B599-46B1823EB241}" type="slidenum">
+            <a:fld id="{F50AF8C1-7852-4FA5-B2CC-ACBE3B5DCF13}" type="slidenum">
               <a:rPr lang="en-US"/>
               <a:t>‹#›</a:t>
             </a:fld>
